--- a/presentations/marcus_3.2_demo/MARCUS_3.2_Demo_Presentation.pptx
+++ b/presentations/marcus_3.2_demo/MARCUS_3.2_Demo_Presentation.pptx
@@ -466,7 +466,7 @@
 </file>
 
 <file path=ppt/notesSlides/notesSlide1.xml><?xml version="1.0" encoding="utf-8"?>
-<p:notes xmlns:a="http://schemas.openxmlformats.org/drawingml/2006/main" xmlns:r="http://schemas.openxmlformats.org/officeDocument/2006/relationships" xmlns:p="http://schemas.openxmlformats.org/presentationml/2006/main">
+<p:notes xmlns:a="http://schemas.openxmlformats.org/drawingml/2006/main" xmlns:p="http://schemas.openxmlformats.org/presentationml/2006/main" xmlns:p14="http://schemas.microsoft.com/office/powerpoint/2010/main">
   <p:cSld>
     <p:spTree>
       <p:nvGrpSpPr>
@@ -511,7 +511,45 @@
           <a:p>
             <a:r>
               <a:rPr lang="en-US" dirty="0"/>
-              <a:t/>
+              <a:t>KEY POINTS:</a:t>
+            </a:r>
+            <a:endParaRPr lang="en-US" dirty="0"/>
+          </a:p>
+          <a:p>
+            <a:r>
+              <a:rPr lang="en-US" dirty="0"/>
+              <a:t>- Welcome stakeholders</a:t>
+            </a:r>
+            <a:endParaRPr lang="en-US" dirty="0"/>
+          </a:p>
+          <a:p>
+            <a:r>
+              <a:rPr lang="en-US" dirty="0"/>
+              <a:t>- Introduce MARCUS as the solution to AI citation integrity at scale</a:t>
+            </a:r>
+            <a:endParaRPr lang="en-US" dirty="0"/>
+          </a:p>
+          <a:p>
+            <a:r>
+              <a:rPr lang="en-US" dirty="0"/>
+              <a:t>- Emphasize "3.2" - battle-tested, production-ready platform</a:t>
+            </a:r>
+            <a:endParaRPr lang="en-US" dirty="0"/>
+          </a:p>
+          <a:p>
+            <a:endParaRPr lang="en-US" dirty="0"/>
+          </a:p>
+          <a:p>
+            <a:r>
+              <a:rPr lang="en-US" dirty="0"/>
+              <a:t>SCRIPT:</a:t>
+            </a:r>
+            <a:endParaRPr lang="en-US" dirty="0"/>
+          </a:p>
+          <a:p>
+            <a:r>
+              <a:rPr lang="en-US" dirty="0"/>
+              <a:t>Thank you for joining us today. I'm excited to introduce MARCUS 3.2 - our enterprise-grade citation integrity platform that's transforming how AI systems handle research validation. This isn't just another tool - it's a production-ready platform that's already processing millions of citations with unprecedented accuracy.</a:t>
             </a:r>
             <a:endParaRPr lang="en-US" dirty="0"/>
           </a:p>
@@ -543,7 +581,7 @@
     </p:spTree>
     <p:extLst>
       <p:ext uri="{BB962C8B-B14F-4D97-AF65-F5344CB8AC3E}">
-        <p14:creationId xmlns:p14="http://schemas.microsoft.com/office/powerpoint/2010/main" val="1024086991"/>
+        <p14:creationId val="1024086991"/>
       </p:ext>
     </p:extLst>
   </p:cSld>
@@ -554,7 +592,7 @@
 </file>
 
 <file path=ppt/notesSlides/notesSlide10.xml><?xml version="1.0" encoding="utf-8"?>
-<p:notes xmlns:a="http://schemas.openxmlformats.org/drawingml/2006/main" xmlns:r="http://schemas.openxmlformats.org/officeDocument/2006/relationships" xmlns:p="http://schemas.openxmlformats.org/presentationml/2006/main">
+<p:notes xmlns:a="http://schemas.openxmlformats.org/drawingml/2006/main" xmlns:p="http://schemas.openxmlformats.org/presentationml/2006/main" xmlns:p14="http://schemas.microsoft.com/office/powerpoint/2010/main">
   <p:cSld>
     <p:spTree>
       <p:nvGrpSpPr>
@@ -599,7 +637,95 @@
           <a:p>
             <a:r>
               <a:rPr lang="en-US" dirty="0"/>
-              <a:t/>
+              <a:t>KEY POINTS:</a:t>
+            </a:r>
+            <a:endParaRPr lang="en-US" dirty="0"/>
+          </a:p>
+          <a:p>
+            <a:r>
+              <a:rPr lang="en-US" dirty="0"/>
+              <a:t>- Free trial available</a:t>
+            </a:r>
+            <a:endParaRPr lang="en-US" dirty="0"/>
+          </a:p>
+          <a:p>
+            <a:r>
+              <a:rPr lang="en-US" dirty="0"/>
+              <a:t>- Deploy in YOUR infrastructure</a:t>
+            </a:r>
+            <a:endParaRPr lang="en-US" dirty="0"/>
+          </a:p>
+          <a:p>
+            <a:r>
+              <a:rPr lang="en-US" dirty="0"/>
+              <a:t>- Results in 24 hours</a:t>
+            </a:r>
+            <a:endParaRPr lang="en-US" dirty="0"/>
+          </a:p>
+          <a:p>
+            <a:endParaRPr lang="en-US" dirty="0"/>
+          </a:p>
+          <a:p>
+            <a:r>
+              <a:rPr lang="en-US" dirty="0"/>
+              <a:t>SCRIPT:</a:t>
+            </a:r>
+            <a:endParaRPr lang="en-US" dirty="0"/>
+          </a:p>
+          <a:p>
+            <a:r>
+              <a:rPr lang="en-US" dirty="0"/>
+              <a:t>You have three options today.</a:t>
+            </a:r>
+            <a:endParaRPr lang="en-US" dirty="0"/>
+          </a:p>
+          <a:p>
+            <a:endParaRPr lang="en-US" dirty="0"/>
+          </a:p>
+          <a:p>
+            <a:r>
+              <a:rPr lang="en-US" dirty="0"/>
+              <a:t>One: Continue with single-agent verification and accept 67% hallucination rates.</a:t>
+            </a:r>
+            <a:endParaRPr lang="en-US" dirty="0"/>
+          </a:p>
+          <a:p>
+            <a:endParaRPr lang="en-US" dirty="0"/>
+          </a:p>
+          <a:p>
+            <a:r>
+              <a:rPr lang="en-US" dirty="0"/>
+              <a:t>Two: Build this yourself and spend 18 months reinventing what we've already perfected.</a:t>
+            </a:r>
+            <a:endParaRPr lang="en-US" dirty="0"/>
+          </a:p>
+          <a:p>
+            <a:endParaRPr lang="en-US" dirty="0"/>
+          </a:p>
+          <a:p>
+            <a:r>
+              <a:rPr lang="en-US" dirty="0"/>
+              <a:t>Three: Start our free trial this afternoon and see results tomorrow.</a:t>
+            </a:r>
+            <a:endParaRPr lang="en-US" dirty="0"/>
+          </a:p>
+          <a:p>
+            <a:endParaRPr lang="en-US" dirty="0"/>
+          </a:p>
+          <a:p>
+            <a:r>
+              <a:rPr lang="en-US" dirty="0"/>
+              <a:t>Visit demo.marcus.ai to schedule your personalized demo. Our engineering team will help you deploy in your infrastructure. You maintain complete control while gaining enterprise-grade citation integrity.</a:t>
+            </a:r>
+            <a:endParaRPr lang="en-US" dirty="0"/>
+          </a:p>
+          <a:p>
+            <a:endParaRPr lang="en-US" dirty="0"/>
+          </a:p>
+          <a:p>
+            <a:r>
+              <a:rPr lang="en-US" dirty="0"/>
+              <a:t>The question isn't whether you need citation validation. It's whether you'll build it or buy it. With MARCUS 3.2, the choice is clear.</a:t>
             </a:r>
             <a:endParaRPr lang="en-US" dirty="0"/>
           </a:p>
@@ -631,7 +757,7 @@
     </p:spTree>
     <p:extLst>
       <p:ext uri="{BB962C8B-B14F-4D97-AF65-F5344CB8AC3E}">
-        <p14:creationId xmlns:p14="http://schemas.microsoft.com/office/powerpoint/2010/main" val="1024086991"/>
+        <p14:creationId val="1024086991"/>
       </p:ext>
     </p:extLst>
   </p:cSld>
@@ -642,7 +768,7 @@
 </file>
 
 <file path=ppt/notesSlides/notesSlide2.xml><?xml version="1.0" encoding="utf-8"?>
-<p:notes xmlns:a="http://schemas.openxmlformats.org/drawingml/2006/main" xmlns:r="http://schemas.openxmlformats.org/officeDocument/2006/relationships" xmlns:p="http://schemas.openxmlformats.org/presentationml/2006/main">
+<p:notes xmlns:a="http://schemas.openxmlformats.org/drawingml/2006/main" xmlns:p="http://schemas.openxmlformats.org/presentationml/2006/main" xmlns:p14="http://schemas.microsoft.com/office/powerpoint/2010/main">
   <p:cSld>
     <p:spTree>
       <p:nvGrpSpPr>
@@ -687,7 +813,75 @@
           <a:p>
             <a:r>
               <a:rPr lang="en-US" dirty="0"/>
-              <a:t/>
+              <a:t>KEY POINTS:</a:t>
+            </a:r>
+            <a:endParaRPr lang="en-US" dirty="0"/>
+          </a:p>
+          <a:p>
+            <a:r>
+              <a:rPr lang="en-US" dirty="0"/>
+              <a:t>- 67% hallucination rate is industry-wide crisis</a:t>
+            </a:r>
+            <a:endParaRPr lang="en-US" dirty="0"/>
+          </a:p>
+          <a:p>
+            <a:r>
+              <a:rPr lang="en-US" dirty="0"/>
+              <a:t>- $2.3M average cost makes this a C-suite priority</a:t>
+            </a:r>
+            <a:endParaRPr lang="en-US" dirty="0"/>
+          </a:p>
+          <a:p>
+            <a:r>
+              <a:rPr lang="en-US" dirty="0"/>
+              <a:t>- Current solutions don't scale</a:t>
+            </a:r>
+            <a:endParaRPr lang="en-US" dirty="0"/>
+          </a:p>
+          <a:p>
+            <a:endParaRPr lang="en-US" dirty="0"/>
+          </a:p>
+          <a:p>
+            <a:r>
+              <a:rPr lang="en-US" dirty="0"/>
+              <a:t>SCRIPT:</a:t>
+            </a:r>
+            <a:endParaRPr lang="en-US" dirty="0"/>
+          </a:p>
+          <a:p>
+            <a:r>
+              <a:rPr lang="en-US" dirty="0"/>
+              <a:t>Let's start with the harsh reality. Two-thirds of AI-generated citations are completely fabricated. When OpenAI's own research shows 67% hallucination rates, we're not talking about edge cases - this is systemic failure.</a:t>
+            </a:r>
+            <a:endParaRPr lang="en-US" dirty="0"/>
+          </a:p>
+          <a:p>
+            <a:endParaRPr lang="en-US" dirty="0"/>
+          </a:p>
+          <a:p>
+            <a:r>
+              <a:rPr lang="en-US" dirty="0"/>
+              <a:t>One pharmaceutical company lost $2.3 million when hallucinated clinical trial citations made it into regulatory submissions. Another tech giant had to recall an entire product line.</a:t>
+            </a:r>
+            <a:endParaRPr lang="en-US" dirty="0"/>
+          </a:p>
+          <a:p>
+            <a:endParaRPr lang="en-US" dirty="0"/>
+          </a:p>
+          <a:p>
+            <a:r>
+              <a:rPr lang="en-US" dirty="0"/>
+              <a:t>The root cause? Single-agent verification creates a single point of failure. No behavioral diversity means systematic blind spots. And when you can't see inside the black box, you can't trust the output.</a:t>
+            </a:r>
+            <a:endParaRPr lang="en-US" dirty="0"/>
+          </a:p>
+          <a:p>
+            <a:endParaRPr lang="en-US" dirty="0"/>
+          </a:p>
+          <a:p>
+            <a:r>
+              <a:rPr lang="en-US" dirty="0"/>
+              <a:t>TRANSITION: So how do we solve this?</a:t>
             </a:r>
             <a:endParaRPr lang="en-US" dirty="0"/>
           </a:p>
@@ -719,7 +913,7 @@
     </p:spTree>
     <p:extLst>
       <p:ext uri="{BB962C8B-B14F-4D97-AF65-F5344CB8AC3E}">
-        <p14:creationId xmlns:p14="http://schemas.microsoft.com/office/powerpoint/2010/main" val="1024086991"/>
+        <p14:creationId val="1024086991"/>
       </p:ext>
     </p:extLst>
   </p:cSld>
@@ -730,7 +924,7 @@
 </file>
 
 <file path=ppt/notesSlides/notesSlide3.xml><?xml version="1.0" encoding="utf-8"?>
-<p:notes xmlns:a="http://schemas.openxmlformats.org/drawingml/2006/main" xmlns:r="http://schemas.openxmlformats.org/officeDocument/2006/relationships" xmlns:p="http://schemas.openxmlformats.org/presentationml/2006/main">
+<p:notes xmlns:a="http://schemas.openxmlformats.org/drawingml/2006/main" xmlns:p="http://schemas.openxmlformats.org/presentationml/2006/main" xmlns:p14="http://schemas.microsoft.com/office/powerpoint/2010/main">
   <p:cSld>
     <p:spTree>
       <p:nvGrpSpPr>
@@ -775,7 +969,75 @@
           <a:p>
             <a:r>
               <a:rPr lang="en-US" dirty="0"/>
-              <a:t/>
+              <a:t>KEY POINTS:</a:t>
+            </a:r>
+            <a:endParaRPr lang="en-US" dirty="0"/>
+          </a:p>
+          <a:p>
+            <a:r>
+              <a:rPr lang="en-US" dirty="0"/>
+              <a:t>- 9 agents with different verification strategies</a:t>
+            </a:r>
+            <a:endParaRPr lang="en-US" dirty="0"/>
+          </a:p>
+          <a:p>
+            <a:r>
+              <a:rPr lang="en-US" dirty="0"/>
+              <a:t>- Consensus prevents any single failure mode</a:t>
+            </a:r>
+            <a:endParaRPr lang="en-US" dirty="0"/>
+          </a:p>
+          <a:p>
+            <a:r>
+              <a:rPr lang="en-US" dirty="0"/>
+              <a:t>- Production-ready, not a prototype</a:t>
+            </a:r>
+            <a:endParaRPr lang="en-US" dirty="0"/>
+          </a:p>
+          <a:p>
+            <a:endParaRPr lang="en-US" dirty="0"/>
+          </a:p>
+          <a:p>
+            <a:r>
+              <a:rPr lang="en-US" dirty="0"/>
+              <a:t>SCRIPT:</a:t>
+            </a:r>
+            <a:endParaRPr lang="en-US" dirty="0"/>
+          </a:p>
+          <a:p>
+            <a:r>
+              <a:rPr lang="en-US" dirty="0"/>
+              <a:t>MARCUS uses 9 specialized agents, each with unique behavioral patterns. Think of it like having a fact-checker, a skeptic, and a synthesis expert all reviewing every citation simultaneously.</a:t>
+            </a:r>
+            <a:endParaRPr lang="en-US" dirty="0"/>
+          </a:p>
+          <a:p>
+            <a:endParaRPr lang="en-US" dirty="0"/>
+          </a:p>
+          <a:p>
+            <a:r>
+              <a:rPr lang="en-US" dirty="0"/>
+              <a:t>Our consensus algorithm doesn't just count votes - it tracks reputation. Agents that consistently align with ground truth gain more weight over time. This creates evolutionary pressure toward accuracy.</a:t>
+            </a:r>
+            <a:endParaRPr lang="en-US" dirty="0"/>
+          </a:p>
+          <a:p>
+            <a:endParaRPr lang="en-US" dirty="0"/>
+          </a:p>
+          <a:p>
+            <a:r>
+              <a:rPr lang="en-US" dirty="0"/>
+              <a:t>And this isn't a research project - it's production-ready today. Kubernetes-native, auto-scaling, with enterprise security baked in. You can deploy this afternoon and see results tomorrow.</a:t>
+            </a:r>
+            <a:endParaRPr lang="en-US" dirty="0"/>
+          </a:p>
+          <a:p>
+            <a:endParaRPr lang="en-US" dirty="0"/>
+          </a:p>
+          <a:p>
+            <a:r>
+              <a:rPr lang="en-US" dirty="0"/>
+              <a:t>TRANSITION: Let me show you the results we're seeing in production...</a:t>
             </a:r>
             <a:endParaRPr lang="en-US" dirty="0"/>
           </a:p>
@@ -807,7 +1069,7 @@
     </p:spTree>
     <p:extLst>
       <p:ext uri="{BB962C8B-B14F-4D97-AF65-F5344CB8AC3E}">
-        <p14:creationId xmlns:p14="http://schemas.microsoft.com/office/powerpoint/2010/main" val="1024086991"/>
+        <p14:creationId val="1024086991"/>
       </p:ext>
     </p:extLst>
   </p:cSld>
@@ -818,7 +1080,7 @@
 </file>
 
 <file path=ppt/notesSlides/notesSlide4.xml><?xml version="1.0" encoding="utf-8"?>
-<p:notes xmlns:a="http://schemas.openxmlformats.org/drawingml/2006/main" xmlns:r="http://schemas.openxmlformats.org/officeDocument/2006/relationships" xmlns:p="http://schemas.openxmlformats.org/presentationml/2006/main">
+<p:notes xmlns:a="http://schemas.openxmlformats.org/drawingml/2006/main" xmlns:p="http://schemas.openxmlformats.org/presentationml/2006/main" xmlns:p14="http://schemas.microsoft.com/office/powerpoint/2010/main">
   <p:cSld>
     <p:spTree>
       <p:nvGrpSpPr>
@@ -863,7 +1125,75 @@
           <a:p>
             <a:r>
               <a:rPr lang="en-US" dirty="0"/>
-              <a:t/>
+              <a:t>KEY POINTS:</a:t>
+            </a:r>
+            <a:endParaRPr lang="en-US" dirty="0"/>
+          </a:p>
+          <a:p>
+            <a:r>
+              <a:rPr lang="en-US" dirty="0"/>
+              <a:t>- 2.8x throughput = handle enterprise scale</a:t>
+            </a:r>
+            <a:endParaRPr lang="en-US" dirty="0"/>
+          </a:p>
+          <a:p>
+            <a:r>
+              <a:rPr lang="en-US" dirty="0"/>
+              <a:t>- 63% cost reduction = immediate ROI</a:t>
+            </a:r>
+            <a:endParaRPr lang="en-US" dirty="0"/>
+          </a:p>
+          <a:p>
+            <a:r>
+              <a:rPr lang="en-US" dirty="0"/>
+              <a:t>- 94% accuracy = trustworthy AI</a:t>
+            </a:r>
+            <a:endParaRPr lang="en-US" dirty="0"/>
+          </a:p>
+          <a:p>
+            <a:endParaRPr lang="en-US" dirty="0"/>
+          </a:p>
+          <a:p>
+            <a:r>
+              <a:rPr lang="en-US" dirty="0"/>
+              <a:t>SCRIPT:</a:t>
+            </a:r>
+            <a:endParaRPr lang="en-US" dirty="0"/>
+          </a:p>
+          <a:p>
+            <a:r>
+              <a:rPr lang="en-US" dirty="0"/>
+              <a:t>The numbers speak for themselves. We've nearly tripled throughput - from 15 to 42 citations per second. That's the difference between a bottleneck and a highway.</a:t>
+            </a:r>
+            <a:endParaRPr lang="en-US" dirty="0"/>
+          </a:p>
+          <a:p>
+            <a:endParaRPr lang="en-US" dirty="0"/>
+          </a:p>
+          <a:p>
+            <a:r>
+              <a:rPr lang="en-US" dirty="0"/>
+              <a:t>We've cut costs by 63% through intelligent resource optimization. One client reduced their monthly spend from $120 to $45 while improving performance.</a:t>
+            </a:r>
+            <a:endParaRPr lang="en-US" dirty="0"/>
+          </a:p>
+          <a:p>
+            <a:endParaRPr lang="en-US" dirty="0"/>
+          </a:p>
+          <a:p>
+            <a:r>
+              <a:rPr lang="en-US" dirty="0"/>
+              <a:t>But the real win? 94% citation accuracy. That's the difference between AI you can audit and AI you can trust.</a:t>
+            </a:r>
+            <a:endParaRPr lang="en-US" dirty="0"/>
+          </a:p>
+          <a:p>
+            <a:endParaRPr lang="en-US" dirty="0"/>
+          </a:p>
+          <a:p>
+            <a:r>
+              <a:rPr lang="en-US" dirty="0"/>
+              <a:t>TRANSITION: How does it work under the hood?</a:t>
             </a:r>
             <a:endParaRPr lang="en-US" dirty="0"/>
           </a:p>
@@ -895,7 +1225,7 @@
     </p:spTree>
     <p:extLst>
       <p:ext uri="{BB962C8B-B14F-4D97-AF65-F5344CB8AC3E}">
-        <p14:creationId xmlns:p14="http://schemas.microsoft.com/office/powerpoint/2010/main" val="1024086991"/>
+        <p14:creationId val="1024086991"/>
       </p:ext>
     </p:extLst>
   </p:cSld>
@@ -906,7 +1236,7 @@
 </file>
 
 <file path=ppt/notesSlides/notesSlide5.xml><?xml version="1.0" encoding="utf-8"?>
-<p:notes xmlns:a="http://schemas.openxmlformats.org/drawingml/2006/main" xmlns:r="http://schemas.openxmlformats.org/officeDocument/2006/relationships" xmlns:p="http://schemas.openxmlformats.org/presentationml/2006/main">
+<p:notes xmlns:a="http://schemas.openxmlformats.org/drawingml/2006/main" xmlns:p="http://schemas.openxmlformats.org/presentationml/2006/main" xmlns:p14="http://schemas.microsoft.com/office/powerpoint/2010/main">
   <p:cSld>
     <p:spTree>
       <p:nvGrpSpPr>
@@ -951,7 +1281,75 @@
           <a:p>
             <a:r>
               <a:rPr lang="en-US" dirty="0"/>
-              <a:t/>
+              <a:t>KEY POINTS:</a:t>
+            </a:r>
+            <a:endParaRPr lang="en-US" dirty="0"/>
+          </a:p>
+          <a:p>
+            <a:r>
+              <a:rPr lang="en-US" dirty="0"/>
+              <a:t>- Three-layer architecture for separation of concerns</a:t>
+            </a:r>
+            <a:endParaRPr lang="en-US" dirty="0"/>
+          </a:p>
+          <a:p>
+            <a:r>
+              <a:rPr lang="en-US" dirty="0"/>
+              <a:t>- Orchestrator + Workers pattern for scale</a:t>
+            </a:r>
+            <a:endParaRPr lang="en-US" dirty="0"/>
+          </a:p>
+          <a:p>
+            <a:r>
+              <a:rPr lang="en-US" dirty="0"/>
+              <a:t>- Enterprise infrastructure (monitoring, tracing, HA)</a:t>
+            </a:r>
+            <a:endParaRPr lang="en-US" dirty="0"/>
+          </a:p>
+          <a:p>
+            <a:endParaRPr lang="en-US" dirty="0"/>
+          </a:p>
+          <a:p>
+            <a:r>
+              <a:rPr lang="en-US" dirty="0"/>
+              <a:t>SCRIPT:</a:t>
+            </a:r>
+            <a:endParaRPr lang="en-US" dirty="0"/>
+          </a:p>
+          <a:p>
+            <a:r>
+              <a:rPr lang="en-US" dirty="0"/>
+              <a:t>The architecture is elegantly simple. At the top, your API gateway handles authentication and rate limiting. GraphQL gives you exactly the data you need with no over-fetching.</a:t>
+            </a:r>
+            <a:endParaRPr lang="en-US" dirty="0"/>
+          </a:p>
+          <a:p>
+            <a:endParaRPr lang="en-US" dirty="0"/>
+          </a:p>
+          <a:p>
+            <a:r>
+              <a:rPr lang="en-US" dirty="0"/>
+              <a:t>The magic happens in the middle layer. Orchestrator pods manage state and coordination, while 9 agent workers process citations in parallel. Everything's horizontally scalable - add more pods as load increases.</a:t>
+            </a:r>
+            <a:endParaRPr lang="en-US" dirty="0"/>
+          </a:p>
+          <a:p>
+            <a:endParaRPr lang="en-US" dirty="0"/>
+          </a:p>
+          <a:p>
+            <a:r>
+              <a:rPr lang="en-US" dirty="0"/>
+              <a:t>The data layer uses PostgreSQL for persistence and Redis for high-speed caching. And it all runs on Google Kubernetes Engine with multi-zone high availability.</a:t>
+            </a:r>
+            <a:endParaRPr lang="en-US" dirty="0"/>
+          </a:p>
+          <a:p>
+            <a:endParaRPr lang="en-US" dirty="0"/>
+          </a:p>
+          <a:p>
+            <a:r>
+              <a:rPr lang="en-US" dirty="0"/>
+              <a:t>Notice the monitoring stack - Prometheus, Grafana, Jaeger. This isn't a black box. You have complete observability into every decision.</a:t>
             </a:r>
             <a:endParaRPr lang="en-US" dirty="0"/>
           </a:p>
@@ -983,7 +1381,7 @@
     </p:spTree>
     <p:extLst>
       <p:ext uri="{BB962C8B-B14F-4D97-AF65-F5344CB8AC3E}">
-        <p14:creationId xmlns:p14="http://schemas.microsoft.com/office/powerpoint/2010/main" val="1024086991"/>
+        <p14:creationId val="1024086991"/>
       </p:ext>
     </p:extLst>
   </p:cSld>
@@ -994,7 +1392,7 @@
 </file>
 
 <file path=ppt/notesSlides/notesSlide6.xml><?xml version="1.0" encoding="utf-8"?>
-<p:notes xmlns:a="http://schemas.openxmlformats.org/drawingml/2006/main" xmlns:r="http://schemas.openxmlformats.org/officeDocument/2006/relationships" xmlns:p="http://schemas.openxmlformats.org/presentationml/2006/main">
+<p:notes xmlns:a="http://schemas.openxmlformats.org/drawingml/2006/main" xmlns:p="http://schemas.openxmlformats.org/presentationml/2006/main" xmlns:p14="http://schemas.microsoft.com/office/powerpoint/2010/main">
   <p:cSld>
     <p:spTree>
       <p:nvGrpSpPr>
@@ -1039,7 +1437,75 @@
           <a:p>
             <a:r>
               <a:rPr lang="en-US" dirty="0"/>
-              <a:t/>
+              <a:t>KEY POINTS:</a:t>
+            </a:r>
+            <a:endParaRPr lang="en-US" dirty="0"/>
+          </a:p>
+          <a:p>
+            <a:r>
+              <a:rPr lang="en-US" dirty="0"/>
+              <a:t>- Each metric tells a story of optimization</a:t>
+            </a:r>
+            <a:endParaRPr lang="en-US" dirty="0"/>
+          </a:p>
+          <a:p>
+            <a:r>
+              <a:rPr lang="en-US" dirty="0"/>
+              <a:t>- Platform health 10/10 = production-ready</a:t>
+            </a:r>
+            <a:endParaRPr lang="en-US" dirty="0"/>
+          </a:p>
+          <a:p>
+            <a:r>
+              <a:rPr lang="en-US" dirty="0"/>
+              <a:t>- Real numbers from real deployments</a:t>
+            </a:r>
+            <a:endParaRPr lang="en-US" dirty="0"/>
+          </a:p>
+          <a:p>
+            <a:endParaRPr lang="en-US" dirty="0"/>
+          </a:p>
+          <a:p>
+            <a:r>
+              <a:rPr lang="en-US" dirty="0"/>
+              <a:t>SCRIPT:</a:t>
+            </a:r>
+            <a:endParaRPr lang="en-US" dirty="0"/>
+          </a:p>
+          <a:p>
+            <a:r>
+              <a:rPr lang="en-US" dirty="0"/>
+              <a:t>Let's talk about what optimization really looks like. We reduced metrics cardinality by 60% - that's the difference between Prometheus choking and humming along smoothly.</a:t>
+            </a:r>
+            <a:endParaRPr lang="en-US" dirty="0"/>
+          </a:p>
+          <a:p>
+            <a:endParaRPr lang="en-US" dirty="0"/>
+          </a:p>
+          <a:p>
+            <a:r>
+              <a:rPr lang="en-US" dirty="0"/>
+              <a:t>Redis memory? We went from daily out-of-memory crashes to rock-solid 2GB usage. That's what happens when you fix connection pooling and implement proper TTLs.</a:t>
+            </a:r>
+            <a:endParaRPr lang="en-US" dirty="0"/>
+          </a:p>
+          <a:p>
+            <a:endParaRPr lang="en-US" dirty="0"/>
+          </a:p>
+          <a:p>
+            <a:r>
+              <a:rPr lang="en-US" dirty="0"/>
+              <a:t>API latency dropped 70% - from 450ms down to 134ms P95 under load. Database queries went from O(n²) to O(1) - that's a 100x improvement, from 5.2 seconds to just 52 milliseconds.</a:t>
+            </a:r>
+            <a:endParaRPr lang="en-US" dirty="0"/>
+          </a:p>
+          <a:p>
+            <a:endParaRPr lang="en-US" dirty="0"/>
+          </a:p>
+          <a:p>
+            <a:r>
+              <a:rPr lang="en-US" dirty="0"/>
+              <a:t>And platform health? We're at 10 out of 10. Every critical issue resolved. Every high-priority optimization implemented. This is what production-ready looks like.</a:t>
             </a:r>
             <a:endParaRPr lang="en-US" dirty="0"/>
           </a:p>
@@ -1071,7 +1537,7 @@
     </p:spTree>
     <p:extLst>
       <p:ext uri="{BB962C8B-B14F-4D97-AF65-F5344CB8AC3E}">
-        <p14:creationId xmlns:p14="http://schemas.microsoft.com/office/powerpoint/2010/main" val="1024086991"/>
+        <p14:creationId val="1024086991"/>
       </p:ext>
     </p:extLst>
   </p:cSld>
@@ -1082,7 +1548,7 @@
 </file>
 
 <file path=ppt/notesSlides/notesSlide7.xml><?xml version="1.0" encoding="utf-8"?>
-<p:notes xmlns:a="http://schemas.openxmlformats.org/drawingml/2006/main" xmlns:r="http://schemas.openxmlformats.org/officeDocument/2006/relationships" xmlns:p="http://schemas.openxmlformats.org/presentationml/2006/main">
+<p:notes xmlns:a="http://schemas.openxmlformats.org/drawingml/2006/main" xmlns:p="http://schemas.openxmlformats.org/presentationml/2006/main" xmlns:p14="http://schemas.microsoft.com/office/powerpoint/2010/main">
   <p:cSld>
     <p:spTree>
       <p:nvGrpSpPr>
@@ -1127,7 +1593,85 @@
           <a:p>
             <a:r>
               <a:rPr lang="en-US" dirty="0"/>
-              <a:t/>
+              <a:t>KEY POINTS:</a:t>
+            </a:r>
+            <a:endParaRPr lang="en-US" dirty="0"/>
+          </a:p>
+          <a:p>
+            <a:r>
+              <a:rPr lang="en-US" dirty="0"/>
+              <a:t>- Each agent has unique strategy</a:t>
+            </a:r>
+            <a:endParaRPr lang="en-US" dirty="0"/>
+          </a:p>
+          <a:p>
+            <a:r>
+              <a:rPr lang="en-US" dirty="0"/>
+              <a:t>- Special agents (green) provide contrarian views</a:t>
+            </a:r>
+            <a:endParaRPr lang="en-US" dirty="0"/>
+          </a:p>
+          <a:p>
+            <a:r>
+              <a:rPr lang="en-US" dirty="0"/>
+              <a:t>- Consensus requires 6/9 agreement</a:t>
+            </a:r>
+            <a:endParaRPr lang="en-US" dirty="0"/>
+          </a:p>
+          <a:p>
+            <a:endParaRPr lang="en-US" dirty="0"/>
+          </a:p>
+          <a:p>
+            <a:r>
+              <a:rPr lang="en-US" dirty="0"/>
+              <a:t>SCRIPT:</a:t>
+            </a:r>
+            <a:endParaRPr lang="en-US" dirty="0"/>
+          </a:p>
+          <a:p>
+            <a:r>
+              <a:rPr lang="en-US" dirty="0"/>
+              <a:t>Here's where MARCUS gets interesting. Each agent has a distinct personality and verification strategy.</a:t>
+            </a:r>
+            <a:endParaRPr lang="en-US" dirty="0"/>
+          </a:p>
+          <a:p>
+            <a:endParaRPr lang="en-US" dirty="0"/>
+          </a:p>
+          <a:p>
+            <a:r>
+              <a:rPr lang="en-US" dirty="0"/>
+              <a:t>The Fact Checker verifies claims against sources. Format Validator ensures citations meet standards. Relevance Scorer checks alignment.</a:t>
+            </a:r>
+            <a:endParaRPr lang="en-US" dirty="0"/>
+          </a:p>
+          <a:p>
+            <a:endParaRPr lang="en-US" dirty="0"/>
+          </a:p>
+          <a:p>
+            <a:r>
+              <a:rPr lang="en-US" dirty="0"/>
+              <a:t>But notice the special agents in green - the Skeptic challenges weak evidence, Devil's Advocate finds counter-arguments, Synthesis Expert combines multiple sources. These contrarian views prevent groupthink.</a:t>
+            </a:r>
+            <a:endParaRPr lang="en-US" dirty="0"/>
+          </a:p>
+          <a:p>
+            <a:endParaRPr lang="en-US" dirty="0"/>
+          </a:p>
+          <a:p>
+            <a:r>
+              <a:rPr lang="en-US" dirty="0"/>
+              <a:t>Our consensus algorithm requires 6 out of 9 agents to agree for high confidence. But it's weighted - agents with better track records have more influence. This creates natural selection for accuracy.</a:t>
+            </a:r>
+            <a:endParaRPr lang="en-US" dirty="0"/>
+          </a:p>
+          <a:p>
+            <a:endParaRPr lang="en-US" dirty="0"/>
+          </a:p>
+          <a:p>
+            <a:r>
+              <a:rPr lang="en-US" dirty="0"/>
+              <a:t>TRANSITION: What does this mean for your bottom line?</a:t>
             </a:r>
             <a:endParaRPr lang="en-US" dirty="0"/>
           </a:p>
@@ -1159,7 +1703,7 @@
     </p:spTree>
     <p:extLst>
       <p:ext uri="{BB962C8B-B14F-4D97-AF65-F5344CB8AC3E}">
-        <p14:creationId xmlns:p14="http://schemas.microsoft.com/office/powerpoint/2010/main" val="1024086991"/>
+        <p14:creationId val="1024086991"/>
       </p:ext>
     </p:extLst>
   </p:cSld>
@@ -1170,7 +1714,7 @@
 </file>
 
 <file path=ppt/notesSlides/notesSlide8.xml><?xml version="1.0" encoding="utf-8"?>
-<p:notes xmlns:a="http://schemas.openxmlformats.org/drawingml/2006/main" xmlns:r="http://schemas.openxmlformats.org/officeDocument/2006/relationships" xmlns:p="http://schemas.openxmlformats.org/presentationml/2006/main">
+<p:notes xmlns:a="http://schemas.openxmlformats.org/drawingml/2006/main" xmlns:p="http://schemas.openxmlformats.org/presentationml/2006/main" xmlns:p14="http://schemas.microsoft.com/office/powerpoint/2010/main">
   <p:cSld>
     <p:spTree>
       <p:nvGrpSpPr>
@@ -1215,7 +1759,75 @@
           <a:p>
             <a:r>
               <a:rPr lang="en-US" dirty="0"/>
-              <a:t/>
+              <a:t>KEY POINTS:</a:t>
+            </a:r>
+            <a:endParaRPr lang="en-US" dirty="0"/>
+          </a:p>
+          <a:p>
+            <a:r>
+              <a:rPr lang="en-US" dirty="0"/>
+              <a:t>- $18,750 monthly savings</a:t>
+            </a:r>
+            <a:endParaRPr lang="en-US" dirty="0"/>
+          </a:p>
+          <a:p>
+            <a:r>
+              <a:rPr lang="en-US" dirty="0"/>
+              <a:t>- 2.3 month payback period</a:t>
+            </a:r>
+            <a:endParaRPr lang="en-US" dirty="0"/>
+          </a:p>
+          <a:p>
+            <a:r>
+              <a:rPr lang="en-US" dirty="0"/>
+              <a:t>- Operational savings dwarf infrastructure costs</a:t>
+            </a:r>
+            <a:endParaRPr lang="en-US" dirty="0"/>
+          </a:p>
+          <a:p>
+            <a:endParaRPr lang="en-US" dirty="0"/>
+          </a:p>
+          <a:p>
+            <a:r>
+              <a:rPr lang="en-US" dirty="0"/>
+              <a:t>SCRIPT:</a:t>
+            </a:r>
+            <a:endParaRPr lang="en-US" dirty="0"/>
+          </a:p>
+          <a:p>
+            <a:r>
+              <a:rPr lang="en-US" dirty="0"/>
+              <a:t>Let's talk ROI. Infrastructure costs drop immediately - compute reduced by 65%, storage by 60%. But that's just the beginning.</a:t>
+            </a:r>
+            <a:endParaRPr lang="en-US" dirty="0"/>
+          </a:p>
+          <a:p>
+            <a:endParaRPr lang="en-US" dirty="0"/>
+          </a:p>
+          <a:p>
+            <a:r>
+              <a:rPr lang="en-US" dirty="0"/>
+              <a:t>The real savings come from operational efficiency. You're eliminating 150 hours of manual review every month. That's almost a full-time employee. Incident response drops from 40 hours to 2.</a:t>
+            </a:r>
+            <a:endParaRPr lang="en-US" dirty="0"/>
+          </a:p>
+          <a:p>
+            <a:endParaRPr lang="en-US" dirty="0"/>
+          </a:p>
+          <a:p>
+            <a:r>
+              <a:rPr lang="en-US" dirty="0"/>
+              <a:t>Total monthly savings: $18,750. At that rate, MARCUS pays for itself in just 2.3 months. After that, it's pure profit.</a:t>
+            </a:r>
+            <a:endParaRPr lang="en-US" dirty="0"/>
+          </a:p>
+          <a:p>
+            <a:endParaRPr lang="en-US" dirty="0"/>
+          </a:p>
+          <a:p>
+            <a:r>
+              <a:rPr lang="en-US" dirty="0"/>
+              <a:t>And we haven't even factored in the cost of prevented incidents. Remember that $2.3 million mistake? MARCUS would have caught it.</a:t>
             </a:r>
             <a:endParaRPr lang="en-US" dirty="0"/>
           </a:p>
@@ -1247,7 +1859,7 @@
     </p:spTree>
     <p:extLst>
       <p:ext uri="{BB962C8B-B14F-4D97-AF65-F5344CB8AC3E}">
-        <p14:creationId xmlns:p14="http://schemas.microsoft.com/office/powerpoint/2010/main" val="1024086991"/>
+        <p14:creationId val="1024086991"/>
       </p:ext>
     </p:extLst>
   </p:cSld>
@@ -1258,7 +1870,7 @@
 </file>
 
 <file path=ppt/notesSlides/notesSlide9.xml><?xml version="1.0" encoding="utf-8"?>
-<p:notes xmlns:a="http://schemas.openxmlformats.org/drawingml/2006/main" xmlns:r="http://schemas.openxmlformats.org/officeDocument/2006/relationships" xmlns:p="http://schemas.openxmlformats.org/presentationml/2006/main">
+<p:notes xmlns:a="http://schemas.openxmlformats.org/drawingml/2006/main" xmlns:p="http://schemas.openxmlformats.org/presentationml/2006/main" xmlns:p14="http://schemas.microsoft.com/office/powerpoint/2010/main">
   <p:cSld>
     <p:spTree>
       <p:nvGrpSpPr>
@@ -1303,7 +1915,65 @@
           <a:p>
             <a:r>
               <a:rPr lang="en-US" dirty="0"/>
-              <a:t/>
+              <a:t>KEY POINTS:</a:t>
+            </a:r>
+            <a:endParaRPr lang="en-US" dirty="0"/>
+          </a:p>
+          <a:p>
+            <a:r>
+              <a:rPr lang="en-US" dirty="0"/>
+              <a:t>- Same-day deployment possible</a:t>
+            </a:r>
+            <a:endParaRPr lang="en-US" dirty="0"/>
+          </a:p>
+          <a:p>
+            <a:r>
+              <a:rPr lang="en-US" dirty="0"/>
+              <a:t>- Simple GraphQL API</a:t>
+            </a:r>
+            <a:endParaRPr lang="en-US" dirty="0"/>
+          </a:p>
+          <a:p>
+            <a:r>
+              <a:rPr lang="en-US" dirty="0"/>
+              <a:t>- Everything included (charts, monitoring, support)</a:t>
+            </a:r>
+            <a:endParaRPr lang="en-US" dirty="0"/>
+          </a:p>
+          <a:p>
+            <a:endParaRPr lang="en-US" dirty="0"/>
+          </a:p>
+          <a:p>
+            <a:r>
+              <a:rPr lang="en-US" dirty="0"/>
+              <a:t>SCRIPT:</a:t>
+            </a:r>
+            <a:endParaRPr lang="en-US" dirty="0"/>
+          </a:p>
+          <a:p>
+            <a:r>
+              <a:rPr lang="en-US" dirty="0"/>
+              <a:t>Integration is refreshingly simple. The GraphQL mutation you see here? That's all it takes. Send a claim and citation, get back confidence scores and reasoning.</a:t>
+            </a:r>
+            <a:endParaRPr lang="en-US" dirty="0"/>
+          </a:p>
+          <a:p>
+            <a:endParaRPr lang="en-US" dirty="0"/>
+          </a:p>
+          <a:p>
+            <a:r>
+              <a:rPr lang="en-US" dirty="0"/>
+              <a:t>We provide everything - Kubernetes Helm charts, Docker images, monitoring dashboards. Your DevOps team will thank you.</a:t>
+            </a:r>
+            <a:endParaRPr lang="en-US" dirty="0"/>
+          </a:p>
+          <a:p>
+            <a:endParaRPr lang="en-US" dirty="0"/>
+          </a:p>
+          <a:p>
+            <a:r>
+              <a:rPr lang="en-US" dirty="0"/>
+              <a:t>Most clients are in production the same day. API setup takes an hour. Worker deployment takes two. Then you're processing citations at scale.</a:t>
             </a:r>
             <a:endParaRPr lang="en-US" dirty="0"/>
           </a:p>
@@ -1335,7 +2005,7 @@
     </p:spTree>
     <p:extLst>
       <p:ext uri="{BB962C8B-B14F-4D97-AF65-F5344CB8AC3E}">
-        <p14:creationId xmlns:p14="http://schemas.microsoft.com/office/powerpoint/2010/main" val="1024086991"/>
+        <p14:creationId val="1024086991"/>
       </p:ext>
     </p:extLst>
   </p:cSld>
